--- a/lecons/LSA/Hydrology/15_LSA_HYDRO_PW02_Drainage_Basin_Morphometry.pptx
+++ b/lecons/LSA/Hydrology/15_LSA_HYDRO_PW02_Drainage_Basin_Morphometry.pptx
@@ -13866,7 +13866,7 @@
               <a:buNone/>
             </a:pPr>
             <a:r>
-              <a:rPr lang="en-US" sz="4000" b="1" dirty="0">
+              <a:rPr lang="en-US" sz="3200" b="1" dirty="0">
                 <a:solidFill>
                   <a:srgbClr val="111111"/>
                 </a:solidFill>
@@ -13876,7 +13876,7 @@
               </a:rPr>
               <a:t>Topic: Drainage Basin Morphometry</a:t>
             </a:r>
-            <a:endParaRPr lang="en-US" sz="4000" dirty="0"/>
+            <a:endParaRPr lang="en-US" sz="3200" dirty="0"/>
           </a:p>
           <a:p>
             <a:pPr algn="l" indent="0" marL="0">
@@ -13886,7 +13886,7 @@
               <a:buNone/>
             </a:pPr>
             <a:r>
-              <a:rPr lang="en-US" sz="4000" b="1" dirty="0">
+              <a:rPr lang="en-US" sz="3200" b="1" dirty="0">
                 <a:solidFill>
                   <a:srgbClr val="111111"/>
                 </a:solidFill>
@@ -13896,7 +13896,7 @@
               </a:rPr>
               <a:t>Sub-topic: Morphometric Analysis of Drainage Networks</a:t>
             </a:r>
-            <a:endParaRPr lang="en-US" sz="4000" dirty="0"/>
+            <a:endParaRPr lang="en-US" sz="3200" dirty="0"/>
           </a:p>
           <a:p>
             <a:pPr algn="l" indent="0" marL="0">
@@ -13906,7 +13906,7 @@
               <a:buNone/>
             </a:pPr>
             <a:r>
-              <a:rPr lang="en-US" sz="4000" b="1" dirty="0">
+              <a:rPr lang="en-US" sz="3200" b="1" dirty="0">
                 <a:solidFill>
                   <a:srgbClr val="990011"/>
                 </a:solidFill>
@@ -13916,7 +13916,7 @@
               </a:rPr>
               <a:t>Practical Work 2: Drainage Basin Morphometry</a:t>
             </a:r>
-            <a:endParaRPr lang="en-US" sz="4000" dirty="0"/>
+            <a:endParaRPr lang="en-US" sz="3200" dirty="0"/>
           </a:p>
         </p:txBody>
       </p:sp>

--- a/lecons/LSA/Hydrology/15_LSA_HYDRO_PW02_Drainage_Basin_Morphometry.pptx
+++ b/lecons/LSA/Hydrology/15_LSA_HYDRO_PW02_Drainage_Basin_Morphometry.pptx
@@ -4695,7 +4695,7 @@
           <a:p>
             <a:r>
               <a:rPr lang="en-US" dirty="0"/>
-              <a:t>For your homework: On a topographic map, order the streams of a small basin and calculate its bifurcation ratio. We shall correct it at the beginning of our next lesson.</a:t>
+              <a:t>For your homework: Find out the age of the Earth. We shall correct it at the beginning of our next lesson.</a:t>
             </a:r>
             <a:endParaRPr lang="en-US" dirty="0"/>
           </a:p>
@@ -4783,7 +4783,7 @@
           <a:p>
             <a:r>
               <a:rPr lang="en-US" dirty="0"/>
-              <a:t>Our next lesson will be on Further Study 4: The Drainage of Cameroon. Thank you for your attention, and see you next time.</a:t>
+              <a:t>Our next lesson will be on Lesson 1: Origin of the Earth. Thank you for your attention, and see you next time.</a:t>
             </a:r>
             <a:endParaRPr lang="en-US" dirty="0"/>
           </a:p>
@@ -18620,7 +18620,7 @@
                 <a:ea typeface="Times New Roman" pitchFamily="34" charset="-122"/>
                 <a:cs typeface="Times New Roman" pitchFamily="34" charset="-120"/>
               </a:rPr>
-              <a:t>On a topographic map, order the streams of a small basin and calculate its bifurcation ratio.</a:t>
+              <a:t>Find out the age of the Earth.</a:t>
             </a:r>
             <a:endParaRPr lang="en-US" sz="4000" dirty="0"/>
           </a:p>
@@ -18859,7 +18859,7 @@
                 <a:ea typeface="Times New Roman" pitchFamily="34" charset="-122"/>
                 <a:cs typeface="Times New Roman" pitchFamily="34" charset="-120"/>
               </a:rPr>
-              <a:t>Further Study 4: The Drainage of Cameroon</a:t>
+              <a:t>Lesson 1: Origin of the Earth</a:t>
             </a:r>
             <a:endParaRPr lang="en-US" sz="4000" dirty="0"/>
           </a:p>
@@ -21284,7 +21284,7 @@
                           <a:ea typeface="Calibri" pitchFamily="34" charset="-122"/>
                           <a:cs typeface="Calibri" pitchFamily="34" charset="-120"/>
                         </a:rPr>
-                        <a:t>On a topographic map, order the streams of a small basin and calculate its bifurcation ratio.</a:t>
+                        <a:t>Find out the age of the Earth.</a:t>
                       </a:r>
                       <a:endParaRPr lang="en-US" sz="1600" dirty="0">
                         <a:latin typeface="Calibri" charset="0"/>
